--- a/files/pres_blue.pptx
+++ b/files/pres_blue.pptx
@@ -269,7 +269,7 @@
           <a:p>
             <a:fld id="{61CE8DF1-FD5E-B642-8F11-2EE1CD276ED0}" type="datetimeFigureOut">
               <a:rPr lang="ru-RU" smtClean="0"/>
-              <a:t>17.09.2026</a:t>
+              <a:t>28.09.2026</a:t>
             </a:fld>
             <a:endParaRPr lang="ru-RU"/>
           </a:p>
@@ -467,7 +467,7 @@
           <a:p>
             <a:fld id="{61CE8DF1-FD5E-B642-8F11-2EE1CD276ED0}" type="datetimeFigureOut">
               <a:rPr lang="ru-RU" smtClean="0"/>
-              <a:t>17.09.2026</a:t>
+              <a:t>28.09.2026</a:t>
             </a:fld>
             <a:endParaRPr lang="ru-RU"/>
           </a:p>
@@ -675,7 +675,7 @@
           <a:p>
             <a:fld id="{61CE8DF1-FD5E-B642-8F11-2EE1CD276ED0}" type="datetimeFigureOut">
               <a:rPr lang="ru-RU" smtClean="0"/>
-              <a:t>17.09.2026</a:t>
+              <a:t>28.09.2026</a:t>
             </a:fld>
             <a:endParaRPr lang="ru-RU"/>
           </a:p>
@@ -873,7 +873,7 @@
           <a:p>
             <a:fld id="{61CE8DF1-FD5E-B642-8F11-2EE1CD276ED0}" type="datetimeFigureOut">
               <a:rPr lang="ru-RU" smtClean="0"/>
-              <a:t>17.09.2026</a:t>
+              <a:t>28.09.2026</a:t>
             </a:fld>
             <a:endParaRPr lang="ru-RU"/>
           </a:p>
@@ -1148,7 +1148,7 @@
           <a:p>
             <a:fld id="{61CE8DF1-FD5E-B642-8F11-2EE1CD276ED0}" type="datetimeFigureOut">
               <a:rPr lang="ru-RU" smtClean="0"/>
-              <a:t>17.09.2026</a:t>
+              <a:t>28.09.2026</a:t>
             </a:fld>
             <a:endParaRPr lang="ru-RU"/>
           </a:p>
@@ -1413,7 +1413,7 @@
           <a:p>
             <a:fld id="{61CE8DF1-FD5E-B642-8F11-2EE1CD276ED0}" type="datetimeFigureOut">
               <a:rPr lang="ru-RU" smtClean="0"/>
-              <a:t>17.09.2026</a:t>
+              <a:t>28.09.2026</a:t>
             </a:fld>
             <a:endParaRPr lang="ru-RU"/>
           </a:p>
@@ -1825,7 +1825,7 @@
           <a:p>
             <a:fld id="{61CE8DF1-FD5E-B642-8F11-2EE1CD276ED0}" type="datetimeFigureOut">
               <a:rPr lang="ru-RU" smtClean="0"/>
-              <a:t>17.09.2026</a:t>
+              <a:t>28.09.2026</a:t>
             </a:fld>
             <a:endParaRPr lang="ru-RU"/>
           </a:p>
@@ -1966,7 +1966,7 @@
           <a:p>
             <a:fld id="{61CE8DF1-FD5E-B642-8F11-2EE1CD276ED0}" type="datetimeFigureOut">
               <a:rPr lang="ru-RU" smtClean="0"/>
-              <a:t>17.09.2026</a:t>
+              <a:t>28.09.2026</a:t>
             </a:fld>
             <a:endParaRPr lang="ru-RU"/>
           </a:p>
@@ -2079,7 +2079,7 @@
           <a:p>
             <a:fld id="{61CE8DF1-FD5E-B642-8F11-2EE1CD276ED0}" type="datetimeFigureOut">
               <a:rPr lang="ru-RU" smtClean="0"/>
-              <a:t>17.09.2026</a:t>
+              <a:t>28.09.2026</a:t>
             </a:fld>
             <a:endParaRPr lang="ru-RU"/>
           </a:p>
@@ -2390,7 +2390,7 @@
           <a:p>
             <a:fld id="{61CE8DF1-FD5E-B642-8F11-2EE1CD276ED0}" type="datetimeFigureOut">
               <a:rPr lang="ru-RU" smtClean="0"/>
-              <a:t>17.09.2026</a:t>
+              <a:t>28.09.2026</a:t>
             </a:fld>
             <a:endParaRPr lang="ru-RU"/>
           </a:p>
@@ -2678,7 +2678,7 @@
           <a:p>
             <a:fld id="{61CE8DF1-FD5E-B642-8F11-2EE1CD276ED0}" type="datetimeFigureOut">
               <a:rPr lang="ru-RU" smtClean="0"/>
-              <a:t>17.09.2026</a:t>
+              <a:t>28.09.2026</a:t>
             </a:fld>
             <a:endParaRPr lang="ru-RU"/>
           </a:p>
@@ -2928,7 +2928,7 @@
           <a:p>
             <a:fld id="{61CE8DF1-FD5E-B642-8F11-2EE1CD276ED0}" type="datetimeFigureOut">
               <a:rPr lang="ru-RU" smtClean="0"/>
-              <a:t>17.09.2026</a:t>
+              <a:t>28.09.2026</a:t>
             </a:fld>
             <a:endParaRPr lang="ru-RU"/>
           </a:p>
@@ -3429,18 +3429,13 @@
           <a:p>
             <a:pPr algn="ctr"/>
             <a:r>
-              <a:rPr lang="ru-RU" sz="2100" b="1" dirty="0" smtClean="0">
+              <a:rPr lang="ru-RU" sz="2100" b="1" dirty="0">
                 <a:solidFill>
                   <a:schemeClr val="bg1"/>
                 </a:solidFill>
               </a:rPr>
               <a:t>НОМЕР ГРУППЫ</a:t>
             </a:r>
-            <a:endParaRPr lang="ru-RU" sz="2100" b="1" dirty="0">
-              <a:solidFill>
-                <a:schemeClr val="bg1"/>
-              </a:solidFill>
-            </a:endParaRPr>
           </a:p>
         </p:txBody>
       </p:sp>
